--- a/media/resources/files/Ekvivalenettuuluk_Onduktardan_menen_Bolchoktor-KataryMenenTort_rIAfuDc.pptx
+++ b/media/resources/files/Ekvivalenettuuluk_Onduktardan_menen_Bolchoktor-KataryMenenTort_rIAfuDc.pptx
@@ -27412,7 +27412,7 @@
                 <a:ea typeface="+mn-ea"/>
                 <a:cs typeface="+mn-cs"/>
               </a:rPr>
-              <a:t>Турдуу пикирлер учун ыраазычылык билдиребиз.</a:t>
+              <a:t>Түрдүү пикирлер үчүн ыраазычылык билдиребиз.</a:t>
             </a:r>
           </a:p>
           <a:p>

--- a/media/resources/files/Ekvivalenettuuluk_Onduktardan_menen_Bolchoktor-KataryMenenTort_rIAfuDc.pptx
+++ b/media/resources/files/Ekvivalenettuuluk_Onduktardan_menen_Bolchoktor-KataryMenenTort_rIAfuDc.pptx
@@ -12012,7 +12012,7 @@
                           <a:ea typeface="+mn-ea"/>
                           <a:cs typeface="+mn-cs"/>
                         </a:rPr>
-                        <a:t>0.9</a:t>
+                        <a:t>0,9</a:t>
                       </a:r>
                     </a:p>
                   </a:txBody>
@@ -12095,7 +12095,7 @@
                           <a:ea typeface="+mn-ea"/>
                           <a:cs typeface="+mn-cs"/>
                         </a:rPr>
-                        <a:t>0.6</a:t>
+                        <a:t>0,6</a:t>
                       </a:r>
                     </a:p>
                   </a:txBody>
@@ -12178,7 +12178,7 @@
                           <a:ea typeface="+mn-ea"/>
                           <a:cs typeface="+mn-cs"/>
                         </a:rPr>
-                        <a:t>0.09</a:t>
+                        <a:t>0,09</a:t>
                       </a:r>
                     </a:p>
                   </a:txBody>
@@ -12268,7 +12268,7 @@
                           <a:ea typeface="+mn-ea"/>
                           <a:cs typeface="+mn-cs"/>
                         </a:rPr>
-                        <a:t>0.06</a:t>
+                        <a:t>0,06</a:t>
                       </a:r>
                     </a:p>
                   </a:txBody>
@@ -12351,7 +12351,7 @@
                           <a:ea typeface="+mn-ea"/>
                           <a:cs typeface="+mn-cs"/>
                         </a:rPr>
-                        <a:t>0.85</a:t>
+                        <a:t>0,85</a:t>
                       </a:r>
                     </a:p>
                   </a:txBody>
@@ -12434,7 +12434,7 @@
                           <a:ea typeface="+mn-ea"/>
                           <a:cs typeface="+mn-cs"/>
                         </a:rPr>
-                        <a:t>0.34</a:t>
+                        <a:t>0,34</a:t>
                       </a:r>
                     </a:p>
                   </a:txBody>
@@ -12524,7 +12524,7 @@
                           <a:ea typeface="+mn-ea"/>
                           <a:cs typeface="+mn-cs"/>
                         </a:rPr>
-                        <a:t>0.4</a:t>
+                        <a:t>0,4</a:t>
                       </a:r>
                     </a:p>
                   </a:txBody>
@@ -12607,7 +12607,7 @@
                           <a:ea typeface="+mn-ea"/>
                           <a:cs typeface="+mn-cs"/>
                         </a:rPr>
-                        <a:t>0.12</a:t>
+                        <a:t>0,12</a:t>
                       </a:r>
                     </a:p>
                   </a:txBody>
@@ -12690,7 +12690,7 @@
                           <a:ea typeface="+mn-ea"/>
                           <a:cs typeface="+mn-cs"/>
                         </a:rPr>
-                        <a:t>0.7</a:t>
+                        <a:t>0,7</a:t>
                       </a:r>
                     </a:p>
                   </a:txBody>
@@ -12780,7 +12780,7 @@
                           <a:ea typeface="+mn-ea"/>
                           <a:cs typeface="+mn-cs"/>
                         </a:rPr>
-                        <a:t>0.45</a:t>
+                        <a:t>0,45</a:t>
                       </a:r>
                     </a:p>
                   </a:txBody>
@@ -12863,7 +12863,7 @@
                           <a:ea typeface="+mn-ea"/>
                           <a:cs typeface="+mn-cs"/>
                         </a:rPr>
-                        <a:t>0.26</a:t>
+                        <a:t>0,26</a:t>
                       </a:r>
                     </a:p>
                   </a:txBody>
@@ -12946,7 +12946,7 @@
                           <a:ea typeface="+mn-ea"/>
                           <a:cs typeface="+mn-cs"/>
                         </a:rPr>
-                        <a:t>0.84</a:t>
+                        <a:t>0,84</a:t>
                       </a:r>
                     </a:p>
                   </a:txBody>
@@ -13036,7 +13036,7 @@
                           <a:ea typeface="+mn-ea"/>
                           <a:cs typeface="+mn-cs"/>
                         </a:rPr>
-                        <a:t>0.57</a:t>
+                        <a:t>0,57</a:t>
                       </a:r>
                     </a:p>
                   </a:txBody>
@@ -13119,7 +13119,7 @@
                           <a:ea typeface="+mn-ea"/>
                           <a:cs typeface="+mn-cs"/>
                         </a:rPr>
-                        <a:t>0.5</a:t>
+                        <a:t>0,5</a:t>
                       </a:r>
                     </a:p>
                   </a:txBody>
@@ -13202,7 +13202,7 @@
                           <a:ea typeface="+mn-ea"/>
                           <a:cs typeface="+mn-cs"/>
                         </a:rPr>
-                        <a:t>0.15</a:t>
+                        <a:t>0,15</a:t>
                       </a:r>
                     </a:p>
                   </a:txBody>
@@ -13292,7 +13292,7 @@
                           <a:ea typeface="+mn-ea"/>
                           <a:cs typeface="+mn-cs"/>
                         </a:rPr>
-                        <a:t>0.1</a:t>
+                        <a:t>0,1</a:t>
                       </a:r>
                     </a:p>
                   </a:txBody>
@@ -13375,7 +13375,7 @@
                           <a:ea typeface="+mn-ea"/>
                           <a:cs typeface="+mn-cs"/>
                         </a:rPr>
-                        <a:t>0.02</a:t>
+                        <a:t>0,02</a:t>
                       </a:r>
                     </a:p>
                   </a:txBody>
@@ -13458,7 +13458,7 @@
                           <a:ea typeface="+mn-ea"/>
                           <a:cs typeface="+mn-cs"/>
                         </a:rPr>
-                        <a:t>0.04</a:t>
+                        <a:t>0,04</a:t>
                       </a:r>
                     </a:p>
                   </a:txBody>
@@ -13548,7 +13548,7 @@
                           <a:ea typeface="+mn-ea"/>
                           <a:cs typeface="+mn-cs"/>
                         </a:rPr>
-                        <a:t>0.08</a:t>
+                        <a:t>0,08</a:t>
                       </a:r>
                     </a:p>
                   </a:txBody>
@@ -13631,7 +13631,7 @@
                           <a:ea typeface="+mn-ea"/>
                           <a:cs typeface="+mn-cs"/>
                         </a:rPr>
-                        <a:t>0.55</a:t>
+                        <a:t>0,55</a:t>
                       </a:r>
                     </a:p>
                   </a:txBody>
@@ -13714,7 +13714,7 @@
                           <a:ea typeface="+mn-ea"/>
                           <a:cs typeface="+mn-cs"/>
                         </a:rPr>
-                        <a:t>0.96</a:t>
+                        <a:t>0,96</a:t>
                       </a:r>
                     </a:p>
                   </a:txBody>
@@ -13804,7 +13804,7 @@
                           <a:ea typeface="+mn-ea"/>
                           <a:cs typeface="+mn-cs"/>
                         </a:rPr>
-                        <a:t>0.35</a:t>
+                        <a:t>0,35</a:t>
                       </a:r>
                     </a:p>
                   </a:txBody>
@@ -13887,7 +13887,7 @@
                           <a:ea typeface="+mn-ea"/>
                           <a:cs typeface="+mn-cs"/>
                         </a:rPr>
-                        <a:t>0.52</a:t>
+                        <a:t>0,52</a:t>
                       </a:r>
                     </a:p>
                   </a:txBody>
@@ -13970,7 +13970,7 @@
                           <a:ea typeface="+mn-ea"/>
                           <a:cs typeface="+mn-cs"/>
                         </a:rPr>
-                        <a:t>0.25</a:t>
+                        <a:t>0,25</a:t>
                       </a:r>
                     </a:p>
                   </a:txBody>
@@ -14060,7 +14060,7 @@
                           <a:ea typeface="+mn-ea"/>
                           <a:cs typeface="+mn-cs"/>
                         </a:rPr>
-                        <a:t>0.22</a:t>
+                        <a:t>0,22</a:t>
                       </a:r>
                     </a:p>
                   </a:txBody>
@@ -14143,7 +14143,7 @@
                           <a:ea typeface="+mn-ea"/>
                           <a:cs typeface="+mn-cs"/>
                         </a:rPr>
-                        <a:t>0.43</a:t>
+                        <a:t>0,43</a:t>
                       </a:r>
                     </a:p>
                   </a:txBody>
@@ -14226,7 +14226,7 @@
                           <a:ea typeface="+mn-ea"/>
                           <a:cs typeface="+mn-cs"/>
                         </a:rPr>
-                        <a:t>0.14</a:t>
+                        <a:t>0,14</a:t>
                       </a:r>
                     </a:p>
                   </a:txBody>
@@ -14316,7 +14316,7 @@
                           <a:ea typeface="+mn-ea"/>
                           <a:cs typeface="+mn-cs"/>
                         </a:rPr>
-                        <a:t>0.75</a:t>
+                        <a:t>0,75</a:t>
                       </a:r>
                     </a:p>
                   </a:txBody>
@@ -14399,7 +14399,7 @@
                           <a:ea typeface="+mn-ea"/>
                           <a:cs typeface="+mn-cs"/>
                         </a:rPr>
-                        <a:t>0.05</a:t>
+                        <a:t>0,05</a:t>
                       </a:r>
                     </a:p>
                   </a:txBody>
@@ -14482,7 +14482,7 @@
                           <a:ea typeface="+mn-ea"/>
                           <a:cs typeface="+mn-cs"/>
                         </a:rPr>
-                        <a:t>0.8</a:t>
+                        <a:t>0,8</a:t>
                       </a:r>
                     </a:p>
                   </a:txBody>
@@ -14572,7 +14572,7 @@
                           <a:ea typeface="+mn-ea"/>
                           <a:cs typeface="+mn-cs"/>
                         </a:rPr>
-                        <a:t>0.44</a:t>
+                        <a:t>0,44</a:t>
                       </a:r>
                     </a:p>
                   </a:txBody>
@@ -14655,7 +14655,7 @@
                           <a:ea typeface="+mn-ea"/>
                           <a:cs typeface="+mn-cs"/>
                         </a:rPr>
-                        <a:t>0.99</a:t>
+                        <a:t>0,99</a:t>
                       </a:r>
                     </a:p>
                   </a:txBody>
@@ -14738,7 +14738,7 @@
                           <a:ea typeface="+mn-ea"/>
                           <a:cs typeface="+mn-cs"/>
                         </a:rPr>
-                        <a:t>0.28</a:t>
+                        <a:t>0,28</a:t>
                       </a:r>
                     </a:p>
                   </a:txBody>
@@ -14828,7 +14828,7 @@
                           <a:ea typeface="+mn-ea"/>
                           <a:cs typeface="+mn-cs"/>
                         </a:rPr>
-                        <a:t>0.65</a:t>
+                        <a:t>0,65</a:t>
                       </a:r>
                     </a:p>
                   </a:txBody>
@@ -14911,7 +14911,7 @@
                           <a:ea typeface="+mn-ea"/>
                           <a:cs typeface="+mn-cs"/>
                         </a:rPr>
-                        <a:t>0.2</a:t>
+                        <a:t>0,2</a:t>
                       </a:r>
                     </a:p>
                   </a:txBody>
@@ -14994,7 +14994,7 @@
                           <a:ea typeface="+mn-ea"/>
                           <a:cs typeface="+mn-cs"/>
                         </a:rPr>
-                        <a:t>0.3</a:t>
+                        <a:t>0,3</a:t>
                       </a:r>
                     </a:p>
                   </a:txBody>
@@ -23098,7 +23098,7 @@
                           <a:ea typeface="+mn-ea"/>
                           <a:cs typeface="+mn-cs"/>
                         </a:rPr>
-                        <a:t>1.25</a:t>
+                        <a:t>1,25</a:t>
                       </a:r>
                     </a:p>
                   </a:txBody>
@@ -23181,7 +23181,7 @@
                           <a:ea typeface="+mn-ea"/>
                           <a:cs typeface="+mn-cs"/>
                         </a:rPr>
-                        <a:t>0.54</a:t>
+                        <a:t>0,54</a:t>
                       </a:r>
                     </a:p>
                   </a:txBody>
@@ -23264,7 +23264,7 @@
                           <a:ea typeface="+mn-ea"/>
                           <a:cs typeface="+mn-cs"/>
                         </a:rPr>
-                        <a:t>1.45</a:t>
+                        <a:t>1,45</a:t>
                       </a:r>
                     </a:p>
                   </a:txBody>
@@ -23354,7 +23354,7 @@
                           <a:ea typeface="+mn-ea"/>
                           <a:cs typeface="+mn-cs"/>
                         </a:rPr>
-                        <a:t>0.012</a:t>
+                        <a:t>0,012</a:t>
                       </a:r>
                     </a:p>
                   </a:txBody>
@@ -23437,7 +23437,7 @@
                           <a:ea typeface="+mn-ea"/>
                           <a:cs typeface="+mn-cs"/>
                         </a:rPr>
-                        <a:t>0.65</a:t>
+                        <a:t>0,65</a:t>
                       </a:r>
                     </a:p>
                   </a:txBody>
@@ -23520,7 +23520,7 @@
                           <a:ea typeface="+mn-ea"/>
                           <a:cs typeface="+mn-cs"/>
                         </a:rPr>
-                        <a:t>0.875</a:t>
+                        <a:t>0,875</a:t>
                       </a:r>
                     </a:p>
                   </a:txBody>
@@ -23610,7 +23610,7 @@
                           <a:ea typeface="+mn-ea"/>
                           <a:cs typeface="+mn-cs"/>
                         </a:rPr>
-                        <a:t>0.52</a:t>
+                        <a:t>0,52</a:t>
                       </a:r>
                     </a:p>
                   </a:txBody>
@@ -23693,7 +23693,7 @@
                           <a:ea typeface="+mn-ea"/>
                           <a:cs typeface="+mn-cs"/>
                         </a:rPr>
-                        <a:t>0.72</a:t>
+                        <a:t>0,72</a:t>
                       </a:r>
                     </a:p>
                   </a:txBody>
@@ -23776,7 +23776,7 @@
                           <a:ea typeface="+mn-ea"/>
                           <a:cs typeface="+mn-cs"/>
                         </a:rPr>
-                        <a:t>1.35</a:t>
+                        <a:t>1,35</a:t>
                       </a:r>
                     </a:p>
                   </a:txBody>
@@ -23866,7 +23866,7 @@
                           <a:ea typeface="+mn-ea"/>
                           <a:cs typeface="+mn-cs"/>
                         </a:rPr>
-                        <a:t>0.375</a:t>
+                        <a:t>0,375</a:t>
                       </a:r>
                     </a:p>
                   </a:txBody>
@@ -23949,7 +23949,7 @@
                           <a:ea typeface="+mn-ea"/>
                           <a:cs typeface="+mn-cs"/>
                         </a:rPr>
-                        <a:t>0.95</a:t>
+                        <a:t>0,95</a:t>
                       </a:r>
                     </a:p>
                   </a:txBody>
@@ -24032,7 +24032,7 @@
                           <a:ea typeface="+mn-ea"/>
                           <a:cs typeface="+mn-cs"/>
                         </a:rPr>
-                        <a:t>0.55</a:t>
+                        <a:t>0,55</a:t>
                       </a:r>
                     </a:p>
                   </a:txBody>
@@ -24122,7 +24122,7 @@
                           <a:ea typeface="+mn-ea"/>
                           <a:cs typeface="+mn-cs"/>
                         </a:rPr>
-                        <a:t>0.014</a:t>
+                        <a:t>0,014</a:t>
                       </a:r>
                     </a:p>
                   </a:txBody>
@@ -24205,7 +24205,7 @@
                           <a:ea typeface="+mn-ea"/>
                           <a:cs typeface="+mn-cs"/>
                         </a:rPr>
-                        <a:t>1.08</a:t>
+                        <a:t>1,08</a:t>
                       </a:r>
                     </a:p>
                   </a:txBody>
@@ -24288,7 +24288,7 @@
                           <a:ea typeface="+mn-ea"/>
                           <a:cs typeface="+mn-cs"/>
                         </a:rPr>
-                        <a:t>0.75</a:t>
+                        <a:t>0,75</a:t>
                       </a:r>
                     </a:p>
                   </a:txBody>
@@ -24378,7 +24378,7 @@
                           <a:ea typeface="+mn-ea"/>
                           <a:cs typeface="+mn-cs"/>
                         </a:rPr>
-                        <a:t>1.3</a:t>
+                        <a:t>1,3</a:t>
                       </a:r>
                     </a:p>
                   </a:txBody>
@@ -24461,7 +24461,7 @@
                           <a:ea typeface="+mn-ea"/>
                           <a:cs typeface="+mn-cs"/>
                         </a:rPr>
-                        <a:t>0.045</a:t>
+                        <a:t>0,045</a:t>
                       </a:r>
                     </a:p>
                   </a:txBody>
@@ -24544,7 +24544,7 @@
                           <a:ea typeface="+mn-ea"/>
                           <a:cs typeface="+mn-cs"/>
                         </a:rPr>
-                        <a:t>0.006</a:t>
+                        <a:t>0,006</a:t>
                       </a:r>
                     </a:p>
                   </a:txBody>
@@ -24634,7 +24634,7 @@
                           <a:ea typeface="+mn-ea"/>
                           <a:cs typeface="+mn-cs"/>
                         </a:rPr>
-                        <a:t>1.09</a:t>
+                        <a:t>1,09</a:t>
                       </a:r>
                     </a:p>
                   </a:txBody>
@@ -24717,7 +24717,7 @@
                           <a:ea typeface="+mn-ea"/>
                           <a:cs typeface="+mn-cs"/>
                         </a:rPr>
-                        <a:t>0.35</a:t>
+                        <a:t>0,35</a:t>
                       </a:r>
                     </a:p>
                   </a:txBody>
@@ -24800,7 +24800,7 @@
                           <a:ea typeface="+mn-ea"/>
                           <a:cs typeface="+mn-cs"/>
                         </a:rPr>
-                        <a:t>1.15</a:t>
+                        <a:t>1,15</a:t>
                       </a:r>
                     </a:p>
                   </a:txBody>
@@ -24890,7 +24890,7 @@
                           <a:ea typeface="+mn-ea"/>
                           <a:cs typeface="+mn-cs"/>
                         </a:rPr>
-                        <a:t>1.24</a:t>
+                        <a:t>1,24</a:t>
                       </a:r>
                     </a:p>
                   </a:txBody>
@@ -24973,7 +24973,7 @@
                           <a:ea typeface="+mn-ea"/>
                           <a:cs typeface="+mn-cs"/>
                         </a:rPr>
-                        <a:t>0.125</a:t>
+                        <a:t>0,125</a:t>
                       </a:r>
                     </a:p>
                   </a:txBody>
@@ -25056,7 +25056,7 @@
                           <a:ea typeface="+mn-ea"/>
                           <a:cs typeface="+mn-cs"/>
                         </a:rPr>
-                        <a:t>0.055</a:t>
+                        <a:t>0,055</a:t>
                       </a:r>
                     </a:p>
                   </a:txBody>
@@ -25146,7 +25146,7 @@
                           <a:ea typeface="+mn-ea"/>
                           <a:cs typeface="+mn-cs"/>
                         </a:rPr>
-                        <a:t>0.84</a:t>
+                        <a:t>0,84</a:t>
                       </a:r>
                     </a:p>
                   </a:txBody>
@@ -25229,7 +25229,7 @@
                           <a:ea typeface="+mn-ea"/>
                           <a:cs typeface="+mn-cs"/>
                         </a:rPr>
-                        <a:t>1.06</a:t>
+                        <a:t>1,06</a:t>
                       </a:r>
                     </a:p>
                   </a:txBody>
@@ -25312,7 +25312,7 @@
                           <a:ea typeface="+mn-ea"/>
                           <a:cs typeface="+mn-cs"/>
                         </a:rPr>
-                        <a:t>0.036</a:t>
+                        <a:t>0,036</a:t>
                       </a:r>
                     </a:p>
                   </a:txBody>
@@ -25402,7 +25402,7 @@
                           <a:ea typeface="+mn-ea"/>
                           <a:cs typeface="+mn-cs"/>
                         </a:rPr>
-                        <a:t>0.065</a:t>
+                        <a:t>0,065</a:t>
                       </a:r>
                     </a:p>
                   </a:txBody>
@@ -25485,7 +25485,7 @@
                           <a:ea typeface="+mn-ea"/>
                           <a:cs typeface="+mn-cs"/>
                         </a:rPr>
-                        <a:t>0.68</a:t>
+                        <a:t>0,68</a:t>
                       </a:r>
                     </a:p>
                   </a:txBody>
@@ -25568,7 +25568,7 @@
                           <a:ea typeface="+mn-ea"/>
                           <a:cs typeface="+mn-cs"/>
                         </a:rPr>
-                        <a:t>1.125</a:t>
+                        <a:t>1,125</a:t>
                       </a:r>
                     </a:p>
                   </a:txBody>
@@ -25658,7 +25658,7 @@
                           <a:ea typeface="+mn-ea"/>
                           <a:cs typeface="+mn-cs"/>
                         </a:rPr>
-                        <a:t>1.7</a:t>
+                        <a:t>1,7</a:t>
                       </a:r>
                     </a:p>
                   </a:txBody>
@@ -25741,7 +25741,7 @@
                           <a:ea typeface="+mn-ea"/>
                           <a:cs typeface="+mn-cs"/>
                         </a:rPr>
-                        <a:t>0.035</a:t>
+                        <a:t>0,035</a:t>
                       </a:r>
                     </a:p>
                   </a:txBody>
@@ -25824,7 +25824,7 @@
                           <a:ea typeface="+mn-ea"/>
                           <a:cs typeface="+mn-cs"/>
                         </a:rPr>
-                        <a:t>1.65</a:t>
+                        <a:t>1,65</a:t>
                       </a:r>
                     </a:p>
                   </a:txBody>
@@ -25914,7 +25914,7 @@
                           <a:ea typeface="+mn-ea"/>
                           <a:cs typeface="+mn-cs"/>
                         </a:rPr>
-                        <a:t>0.64</a:t>
+                        <a:t>0,64</a:t>
                       </a:r>
                     </a:p>
                   </a:txBody>
@@ -25997,7 +25997,7 @@
                           <a:ea typeface="+mn-ea"/>
                           <a:cs typeface="+mn-cs"/>
                         </a:rPr>
-                        <a:t>1.55</a:t>
+                        <a:t>1,55</a:t>
                       </a:r>
                     </a:p>
                   </a:txBody>
@@ -26080,7 +26080,7 @@
                           <a:ea typeface="+mn-ea"/>
                           <a:cs typeface="+mn-cs"/>
                         </a:rPr>
-                        <a:t>0.625</a:t>
+                        <a:t>0,625</a:t>
                       </a:r>
                     </a:p>
                   </a:txBody>
